--- a/REI-Combinatoria/Materiales en español/06b - Fase1_InformeGrupal_Presentación.pptx
+++ b/REI-Combinatoria/Materiales en español/06b - Fase1_InformeGrupal_Presentación.pptx
@@ -288,6 +288,14 @@
 </p:presentation>
 </file>
 
+<file path=ppt/revisionInfo.xml><?xml version="1.0" encoding="utf-8"?>
+<p1510:revInfo xmlns:a="http://schemas.openxmlformats.org/drawingml/2006/main" xmlns:r="http://schemas.openxmlformats.org/officeDocument/2006/relationships" xmlns:p1510="http://schemas.microsoft.com/office/powerpoint/2015/10/main">
+  <p1510:revLst>
+    <p1510:client id="{66A623CE-E0FF-4446-9D64-3A69D6BD058C}" v="3" dt="2025-10-16T17:33:37.729"/>
+  </p1510:revLst>
+</p1510:revInfo>
+</file>
+
 <file path=ppt/changesInfos/changesInfo1.xml><?xml version="1.0" encoding="utf-8"?>
 <pc:chgInfo xmlns:a="http://schemas.openxmlformats.org/drawingml/2006/main" xmlns:r="http://schemas.openxmlformats.org/officeDocument/2006/relationships" xmlns:ac="http://schemas.microsoft.com/office/drawing/2013/main/command" xmlns:pc="http://schemas.microsoft.com/office/powerpoint/2013/main/command">
   <pc:docChgLst>
@@ -303,14 +311,6 @@
           <pc:docMk/>
           <pc:sldMk cId="0" sldId="257"/>
         </pc:sldMkLst>
-        <pc:spChg chg="mod">
-          <ac:chgData name="Susana Vásquez" userId="dffc548e-2323-4ffc-a8aa-757e426c1faa" providerId="ADAL" clId="{CF63DCFE-6E8F-49D3-8CA1-5C5CC042C0EF}" dt="2025-01-13T18:05:04.101" v="20" actId="20577"/>
-          <ac:spMkLst>
-            <pc:docMk/>
-            <pc:sldMk cId="0" sldId="257"/>
-            <ac:spMk id="82" creationId="{00000000-0000-0000-0000-000000000000}"/>
-          </ac:spMkLst>
-        </pc:spChg>
       </pc:sldChg>
       <pc:sldChg chg="modSp mod">
         <pc:chgData name="Susana Vásquez" userId="dffc548e-2323-4ffc-a8aa-757e426c1faa" providerId="ADAL" clId="{CF63DCFE-6E8F-49D3-8CA1-5C5CC042C0EF}" dt="2025-01-13T18:05:17.117" v="31" actId="20577"/>
@@ -318,14 +318,6 @@
           <pc:docMk/>
           <pc:sldMk cId="0" sldId="258"/>
         </pc:sldMkLst>
-        <pc:spChg chg="mod">
-          <ac:chgData name="Susana Vásquez" userId="dffc548e-2323-4ffc-a8aa-757e426c1faa" providerId="ADAL" clId="{CF63DCFE-6E8F-49D3-8CA1-5C5CC042C0EF}" dt="2025-01-13T18:05:17.117" v="31" actId="20577"/>
-          <ac:spMkLst>
-            <pc:docMk/>
-            <pc:sldMk cId="0" sldId="258"/>
-            <ac:spMk id="88" creationId="{00000000-0000-0000-0000-000000000000}"/>
-          </ac:spMkLst>
-        </pc:spChg>
       </pc:sldChg>
       <pc:sldChg chg="modSp mod">
         <pc:chgData name="Susana Vásquez" userId="dffc548e-2323-4ffc-a8aa-757e426c1faa" providerId="ADAL" clId="{CF63DCFE-6E8F-49D3-8CA1-5C5CC042C0EF}" dt="2025-01-13T18:05:34.509" v="37" actId="20577"/>
@@ -333,14 +325,38 @@
           <pc:docMk/>
           <pc:sldMk cId="0" sldId="260"/>
         </pc:sldMkLst>
-        <pc:spChg chg="mod">
-          <ac:chgData name="Susana Vásquez" userId="dffc548e-2323-4ffc-a8aa-757e426c1faa" providerId="ADAL" clId="{CF63DCFE-6E8F-49D3-8CA1-5C5CC042C0EF}" dt="2025-01-13T18:05:34.509" v="37" actId="20577"/>
-          <ac:spMkLst>
+      </pc:sldChg>
+    </pc:docChg>
+  </pc:docChgLst>
+  <pc:docChgLst>
+    <pc:chgData name="Susana Vasquez Elias" userId="e776416f-e583-4d77-b224-146689d50a03" providerId="ADAL" clId="{3C100498-C411-419B-B5E6-C2EF21CD595F}"/>
+    <pc:docChg chg="modSld">
+      <pc:chgData name="Susana Vasquez Elias" userId="e776416f-e583-4d77-b224-146689d50a03" providerId="ADAL" clId="{3C100498-C411-419B-B5E6-C2EF21CD595F}" dt="2025-10-16T17:33:39.460" v="3" actId="1076"/>
+      <pc:docMkLst>
+        <pc:docMk/>
+      </pc:docMkLst>
+      <pc:sldChg chg="addSp modSp mod">
+        <pc:chgData name="Susana Vasquez Elias" userId="e776416f-e583-4d77-b224-146689d50a03" providerId="ADAL" clId="{3C100498-C411-419B-B5E6-C2EF21CD595F}" dt="2025-10-16T17:33:39.460" v="3" actId="1076"/>
+        <pc:sldMkLst>
+          <pc:docMk/>
+          <pc:sldMk cId="0" sldId="256"/>
+        </pc:sldMkLst>
+        <pc:picChg chg="add mod">
+          <ac:chgData name="Susana Vasquez Elias" userId="e776416f-e583-4d77-b224-146689d50a03" providerId="ADAL" clId="{3C100498-C411-419B-B5E6-C2EF21CD595F}" dt="2025-10-16T17:33:34.538" v="1"/>
+          <ac:picMkLst>
             <pc:docMk/>
-            <pc:sldMk cId="0" sldId="260"/>
-            <ac:spMk id="100" creationId="{00000000-0000-0000-0000-000000000000}"/>
-          </ac:spMkLst>
-        </pc:spChg>
+            <pc:sldMk cId="0" sldId="256"/>
+            <ac:picMk id="2" creationId="{CEA99FB5-496B-C6D2-D50E-A549CAA0AEB8}"/>
+          </ac:picMkLst>
+        </pc:picChg>
+        <pc:picChg chg="add mod">
+          <ac:chgData name="Susana Vasquez Elias" userId="e776416f-e583-4d77-b224-146689d50a03" providerId="ADAL" clId="{3C100498-C411-419B-B5E6-C2EF21CD595F}" dt="2025-10-16T17:33:39.460" v="3" actId="1076"/>
+          <ac:picMkLst>
+            <pc:docMk/>
+            <pc:sldMk cId="0" sldId="256"/>
+            <ac:picMk id="3" creationId="{2ADF4236-C311-988C-1EAF-F33444BF8989}"/>
+          </ac:picMkLst>
+        </pc:picChg>
       </pc:sldChg>
     </pc:docChg>
   </pc:docChgLst>
@@ -7112,7 +7128,7 @@
               <a:buNone/>
             </a:pPr>
             <a:r>
-              <a:rPr lang="es" sz="2400" b="1" i="0" u="none" strike="noStrike" cap="none">
+              <a:rPr lang="es" sz="2400" b="1" i="0" u="none" strike="noStrike" cap="none" dirty="0">
                 <a:solidFill>
                   <a:srgbClr val="262626"/>
                 </a:solidFill>
@@ -7123,7 +7139,7 @@
               </a:rPr>
               <a:t>Miembros del grupo de trabajo:</a:t>
             </a:r>
-            <a:endParaRPr>
+            <a:endParaRPr dirty="0">
               <a:latin typeface="Avenir"/>
               <a:ea typeface="Avenir"/>
               <a:cs typeface="Avenir"/>
@@ -7149,7 +7165,7 @@
               <a:buChar char="▪"/>
             </a:pPr>
             <a:r>
-              <a:rPr lang="es" sz="2400" i="0" u="none" strike="noStrike" cap="none">
+              <a:rPr lang="es" sz="2400" i="0" u="none" strike="noStrike" cap="none" dirty="0">
                 <a:solidFill>
                   <a:srgbClr val="262626"/>
                 </a:solidFill>
@@ -7160,7 +7176,7 @@
               </a:rPr>
               <a:t>...</a:t>
             </a:r>
-            <a:endParaRPr>
+            <a:endParaRPr dirty="0">
               <a:latin typeface="Avenir"/>
               <a:ea typeface="Avenir"/>
               <a:cs typeface="Avenir"/>
@@ -7186,7 +7202,7 @@
               <a:buChar char="▪"/>
             </a:pPr>
             <a:r>
-              <a:rPr lang="es" sz="2400" i="0" u="none" strike="noStrike" cap="none">
+              <a:rPr lang="es" sz="2400" i="0" u="none" strike="noStrike" cap="none" dirty="0">
                 <a:solidFill>
                   <a:srgbClr val="262626"/>
                 </a:solidFill>
@@ -7197,7 +7213,7 @@
               </a:rPr>
               <a:t>...</a:t>
             </a:r>
-            <a:endParaRPr>
+            <a:endParaRPr dirty="0">
               <a:latin typeface="Avenir"/>
               <a:ea typeface="Avenir"/>
               <a:cs typeface="Avenir"/>
@@ -7223,7 +7239,7 @@
               <a:buChar char="▪"/>
             </a:pPr>
             <a:r>
-              <a:rPr lang="es" sz="2400" i="0" u="none" strike="noStrike" cap="none">
+              <a:rPr lang="es" sz="2400" i="0" u="none" strike="noStrike" cap="none" dirty="0">
                 <a:solidFill>
                   <a:srgbClr val="262626"/>
                 </a:solidFill>
@@ -7234,7 +7250,7 @@
               </a:rPr>
               <a:t>...</a:t>
             </a:r>
-            <a:endParaRPr>
+            <a:endParaRPr dirty="0">
               <a:latin typeface="Avenir"/>
               <a:ea typeface="Avenir"/>
               <a:cs typeface="Avenir"/>
@@ -7260,7 +7276,7 @@
               <a:buChar char="▪"/>
             </a:pPr>
             <a:r>
-              <a:rPr lang="es" sz="2400" i="0" u="none" strike="noStrike" cap="none">
+              <a:rPr lang="es" sz="2400" i="0" u="none" strike="noStrike" cap="none" dirty="0">
                 <a:solidFill>
                   <a:srgbClr val="262626"/>
                 </a:solidFill>
@@ -7271,7 +7287,7 @@
               </a:rPr>
               <a:t>...</a:t>
             </a:r>
-            <a:endParaRPr>
+            <a:endParaRPr dirty="0">
               <a:latin typeface="Avenir"/>
               <a:ea typeface="Avenir"/>
               <a:cs typeface="Avenir"/>
@@ -7280,6 +7296,52 @@
           </a:p>
         </p:txBody>
       </p:sp>
+      <p:pic>
+        <p:nvPicPr>
+          <p:cNvPr id="3" name="Picture 2" descr="A grey square with white text&#10;&#10;AI-generated content may be incorrect.">
+            <a:extLst>
+              <a:ext uri="{FF2B5EF4-FFF2-40B4-BE49-F238E27FC236}">
+                <a16:creationId xmlns:a16="http://schemas.microsoft.com/office/drawing/2014/main" id="{2ADF4236-C311-988C-1EAF-F33444BF8989}"/>
+              </a:ext>
+            </a:extLst>
+          </p:cNvPr>
+          <p:cNvPicPr>
+            <a:picLocks noChangeAspect="1"/>
+          </p:cNvPicPr>
+          <p:nvPr/>
+        </p:nvPicPr>
+        <p:blipFill rotWithShape="1">
+          <a:blip r:embed="rId4">
+            <a:extLst>
+              <a:ext uri="{28A0092B-C50C-407E-A947-70E740481C1C}">
+                <a14:useLocalDpi xmlns:a14="http://schemas.microsoft.com/office/drawing/2010/main" val="0"/>
+              </a:ext>
+            </a:extLst>
+          </a:blip>
+          <a:srcRect r="18171" b="16231"/>
+          <a:stretch>
+            <a:fillRect/>
+          </a:stretch>
+        </p:blipFill>
+        <p:spPr bwMode="auto">
+          <a:xfrm>
+            <a:off x="6679565" y="5860757"/>
+            <a:ext cx="2092960" cy="556895"/>
+          </a:xfrm>
+          <a:prstGeom prst="rect">
+            <a:avLst/>
+          </a:prstGeom>
+          <a:noFill/>
+          <a:ln>
+            <a:noFill/>
+          </a:ln>
+          <a:extLst>
+            <a:ext uri="{53640926-AAD7-44D8-BBD7-CCE9431645EC}">
+              <a14:shadowObscured xmlns:a14="http://schemas.microsoft.com/office/drawing/2010/main"/>
+            </a:ext>
+          </a:extLst>
+        </p:spPr>
+      </p:pic>
     </p:spTree>
   </p:cSld>
   <p:clrMapOvr>
